--- a/어딨어_내_화장실_발표자료_최종.pptx
+++ b/어딨어_내_화장실_발표자료_최종.pptx
@@ -1510,7 +1510,40 @@
                 <a:ea typeface="맑은 고딕" pitchFamily="34" charset="-122"/>
                 <a:cs typeface="맑은 고딕" pitchFamily="34" charset="-120"/>
               </a:rPr>
-              <a:t>PROJECT BRIEFING · 코드 &amp; 동작 원리 설명회</a:t>
+              <a:t>PROJECT BRIEFING · 코드 &amp; </a:t>
+            </a:r>
+            <a:r>
+              <a:rPr lang="en-US" sz="1400" b="1" kern="0" spc="200" dirty="0" err="1">
+                <a:solidFill>
+                  <a:srgbClr val="FFC107"/>
+                </a:solidFill>
+                <a:latin typeface="맑은 고딕" pitchFamily="34" charset="0"/>
+                <a:ea typeface="맑은 고딕" pitchFamily="34" charset="-122"/>
+                <a:cs typeface="맑은 고딕" pitchFamily="34" charset="-120"/>
+              </a:rPr>
+              <a:t>동작</a:t>
+            </a:r>
+            <a:r>
+              <a:rPr lang="en-US" sz="1400" b="1" kern="0" spc="200" dirty="0">
+                <a:solidFill>
+                  <a:srgbClr val="FFC107"/>
+                </a:solidFill>
+                <a:latin typeface="맑은 고딕" pitchFamily="34" charset="0"/>
+                <a:ea typeface="맑은 고딕" pitchFamily="34" charset="-122"/>
+                <a:cs typeface="맑은 고딕" pitchFamily="34" charset="-120"/>
+              </a:rPr>
+              <a:t> </a:t>
+            </a:r>
+            <a:r>
+              <a:rPr lang="en-US" sz="1400" b="1" kern="0" spc="200" dirty="0" err="1">
+                <a:solidFill>
+                  <a:srgbClr val="FFC107"/>
+                </a:solidFill>
+                <a:latin typeface="맑은 고딕" pitchFamily="34" charset="0"/>
+                <a:ea typeface="맑은 고딕" pitchFamily="34" charset="-122"/>
+                <a:cs typeface="맑은 고딕" pitchFamily="34" charset="-120"/>
+              </a:rPr>
+              <a:t>원리</a:t>
             </a:r>
             <a:endParaRPr lang="en-US" sz="1400" dirty="0"/>
           </a:p>
@@ -1563,8 +1596,8 @@
         </p:nvSpPr>
         <p:spPr>
           <a:xfrm>
-            <a:off x="822960" y="3977640"/>
-            <a:ext cx="7863840" cy="1005840"/>
+            <a:off x="822959" y="3977640"/>
+            <a:ext cx="8251767" cy="1005840"/>
           </a:xfrm>
           <a:prstGeom prst="rect">
             <a:avLst/>
@@ -1591,9 +1624,74 @@
                 <a:ea typeface="맑은 고딕" pitchFamily="34" charset="-122"/>
                 <a:cs typeface="맑은 고딕" pitchFamily="34" charset="-120"/>
               </a:rPr>
-              <a:t>GPS 기반 공중화장실 탐색 웹앱 — 단일 HTML 파일로 동작하는</a:t>
-            </a:r>
-            <a:endParaRPr lang="en-US" sz="1700" dirty="0"/>
+              <a:t>GPS 기반 공중화장실 </a:t>
+            </a:r>
+            <a:r>
+              <a:rPr lang="en-US" sz="1700" dirty="0" err="1">
+                <a:solidFill>
+                  <a:srgbClr val="D6E8FF"/>
+                </a:solidFill>
+                <a:latin typeface="맑은 고딕" pitchFamily="34" charset="0"/>
+                <a:ea typeface="맑은 고딕" pitchFamily="34" charset="-122"/>
+                <a:cs typeface="맑은 고딕" pitchFamily="34" charset="-120"/>
+              </a:rPr>
+              <a:t>탐색</a:t>
+            </a:r>
+            <a:r>
+              <a:rPr lang="en-US" sz="1700" dirty="0">
+                <a:solidFill>
+                  <a:srgbClr val="D6E8FF"/>
+                </a:solidFill>
+                <a:latin typeface="맑은 고딕" pitchFamily="34" charset="0"/>
+                <a:ea typeface="맑은 고딕" pitchFamily="34" charset="-122"/>
+                <a:cs typeface="맑은 고딕" pitchFamily="34" charset="-120"/>
+              </a:rPr>
+              <a:t> </a:t>
+            </a:r>
+            <a:r>
+              <a:rPr lang="en-US" sz="1700" dirty="0" err="1">
+                <a:solidFill>
+                  <a:srgbClr val="D6E8FF"/>
+                </a:solidFill>
+                <a:latin typeface="맑은 고딕" pitchFamily="34" charset="0"/>
+                <a:ea typeface="맑은 고딕" pitchFamily="34" charset="-122"/>
+                <a:cs typeface="맑은 고딕" pitchFamily="34" charset="-120"/>
+              </a:rPr>
+              <a:t>웹</a:t>
+            </a:r>
+            <a:r>
+              <a:rPr lang="ko-KR" altLang="en-US" sz="1700" dirty="0">
+                <a:solidFill>
+                  <a:srgbClr val="D6E8FF"/>
+                </a:solidFill>
+                <a:latin typeface="맑은 고딕" pitchFamily="34" charset="0"/>
+                <a:ea typeface="맑은 고딕" pitchFamily="34" charset="-122"/>
+                <a:cs typeface="맑은 고딕" pitchFamily="34" charset="-120"/>
+              </a:rPr>
+              <a:t> </a:t>
+            </a:r>
+            <a:r>
+              <a:rPr lang="en-US" sz="1700" dirty="0" err="1">
+                <a:solidFill>
+                  <a:srgbClr val="D6E8FF"/>
+                </a:solidFill>
+                <a:latin typeface="맑은 고딕" pitchFamily="34" charset="0"/>
+                <a:ea typeface="맑은 고딕" pitchFamily="34" charset="-122"/>
+                <a:cs typeface="맑은 고딕" pitchFamily="34" charset="-120"/>
+              </a:rPr>
+              <a:t>앱</a:t>
+            </a:r>
+            <a:r>
+              <a:rPr lang="en-US" sz="1700" dirty="0">
+                <a:solidFill>
+                  <a:srgbClr val="D6E8FF"/>
+                </a:solidFill>
+                <a:latin typeface="맑은 고딕" pitchFamily="34" charset="0"/>
+                <a:ea typeface="맑은 고딕" pitchFamily="34" charset="-122"/>
+                <a:cs typeface="맑은 고딕" pitchFamily="34" charset="-120"/>
+              </a:rPr>
+              <a:t> </a:t>
+            </a:r>
           </a:p>
           <a:p>
             <a:pPr marL="0" indent="0">
@@ -1611,7 +1709,66 @@
                 <a:ea typeface="맑은 고딕" pitchFamily="34" charset="-122"/>
                 <a:cs typeface="맑은 고딕" pitchFamily="34" charset="-120"/>
               </a:rPr>
-              <a:t>지도·필터·리뷰·코인 시스템의 코드 구조와 작동 원리</a:t>
+              <a:t>— 단일 HTML </a:t>
+            </a:r>
+            <a:r>
+              <a:rPr lang="en-US" sz="1700" dirty="0" err="1">
+                <a:solidFill>
+                  <a:srgbClr val="D6E8FF"/>
+                </a:solidFill>
+                <a:latin typeface="맑은 고딕" pitchFamily="34" charset="0"/>
+                <a:ea typeface="맑은 고딕" pitchFamily="34" charset="-122"/>
+                <a:cs typeface="맑은 고딕" pitchFamily="34" charset="-120"/>
+              </a:rPr>
+              <a:t>파일로</a:t>
+            </a:r>
+            <a:r>
+              <a:rPr lang="en-US" sz="1700" dirty="0">
+                <a:solidFill>
+                  <a:srgbClr val="D6E8FF"/>
+                </a:solidFill>
+                <a:latin typeface="맑은 고딕" pitchFamily="34" charset="0"/>
+                <a:ea typeface="맑은 고딕" pitchFamily="34" charset="-122"/>
+                <a:cs typeface="맑은 고딕" pitchFamily="34" charset="-120"/>
+              </a:rPr>
+              <a:t> </a:t>
+            </a:r>
+            <a:r>
+              <a:rPr lang="en-US" sz="1700" dirty="0" err="1">
+                <a:solidFill>
+                  <a:srgbClr val="D6E8FF"/>
+                </a:solidFill>
+                <a:latin typeface="맑은 고딕" pitchFamily="34" charset="0"/>
+                <a:ea typeface="맑은 고딕" pitchFamily="34" charset="-122"/>
+                <a:cs typeface="맑은 고딕" pitchFamily="34" charset="-120"/>
+              </a:rPr>
+              <a:t>동작하는</a:t>
+            </a:r>
+            <a:r>
+              <a:rPr lang="ko-KR" altLang="en-US" sz="1700" dirty="0"/>
+              <a:t> </a:t>
+            </a:r>
+            <a:r>
+              <a:rPr lang="en-US" sz="1700" dirty="0" err="1">
+                <a:solidFill>
+                  <a:srgbClr val="D6E8FF"/>
+                </a:solidFill>
+                <a:latin typeface="맑은 고딕" pitchFamily="34" charset="0"/>
+                <a:ea typeface="맑은 고딕" pitchFamily="34" charset="-122"/>
+                <a:cs typeface="맑은 고딕" pitchFamily="34" charset="-120"/>
+              </a:rPr>
+              <a:t>지도·필터·리뷰·코인</a:t>
+            </a:r>
+            <a:r>
+              <a:rPr lang="en-US" sz="1700" dirty="0">
+                <a:solidFill>
+                  <a:srgbClr val="D6E8FF"/>
+                </a:solidFill>
+                <a:latin typeface="맑은 고딕" pitchFamily="34" charset="0"/>
+                <a:ea typeface="맑은 고딕" pitchFamily="34" charset="-122"/>
+                <a:cs typeface="맑은 고딕" pitchFamily="34" charset="-120"/>
+              </a:rPr>
+              <a:t> 시스템의 코드 구조와 작동 원리</a:t>
             </a:r>
             <a:endParaRPr lang="en-US" sz="1700" dirty="0"/>
           </a:p>
@@ -5176,8 +5333,8 @@
         </p:nvSpPr>
         <p:spPr>
           <a:xfrm>
-            <a:off x="548640" y="1417320"/>
-            <a:ext cx="8869680" cy="457200"/>
+            <a:off x="548639" y="1417320"/>
+            <a:ext cx="10511843" cy="645266"/>
           </a:xfrm>
           <a:prstGeom prst="rect">
             <a:avLst/>
@@ -5201,9 +5358,133 @@
                 <a:ea typeface="맑은 고딕" pitchFamily="34" charset="-122"/>
                 <a:cs typeface="맑은 고딕" pitchFamily="34" charset="-120"/>
               </a:rPr>
-              <a:t>화장실 하나하나는 좌표·평점·시설 정보를 담은 객체이며, 전체가 하나의 배열로 관리됩니다</a:t>
-            </a:r>
-            <a:endParaRPr lang="en-US" sz="1500" dirty="0"/>
+              <a:t>화장실 하나하나는 좌표·평점·시설 정보를 담은 객체이며, 전체가 하나의 </a:t>
+            </a:r>
+            <a:r>
+              <a:rPr lang="en-US" sz="1500" dirty="0" err="1">
+                <a:solidFill>
+                  <a:srgbClr val="5C7088"/>
+                </a:solidFill>
+                <a:latin typeface="맑은 고딕" pitchFamily="34" charset="0"/>
+                <a:ea typeface="맑은 고딕" pitchFamily="34" charset="-122"/>
+                <a:cs typeface="맑은 고딕" pitchFamily="34" charset="-120"/>
+              </a:rPr>
+              <a:t>배열로</a:t>
+            </a:r>
+            <a:r>
+              <a:rPr lang="en-US" sz="1500" dirty="0">
+                <a:solidFill>
+                  <a:srgbClr val="5C7088"/>
+                </a:solidFill>
+                <a:latin typeface="맑은 고딕" pitchFamily="34" charset="0"/>
+                <a:ea typeface="맑은 고딕" pitchFamily="34" charset="-122"/>
+                <a:cs typeface="맑은 고딕" pitchFamily="34" charset="-120"/>
+              </a:rPr>
+              <a:t> </a:t>
+            </a:r>
+            <a:r>
+              <a:rPr lang="en-US" sz="1500" dirty="0" err="1">
+                <a:solidFill>
+                  <a:srgbClr val="5C7088"/>
+                </a:solidFill>
+                <a:latin typeface="맑은 고딕" pitchFamily="34" charset="0"/>
+                <a:ea typeface="맑은 고딕" pitchFamily="34" charset="-122"/>
+                <a:cs typeface="맑은 고딕" pitchFamily="34" charset="-120"/>
+              </a:rPr>
+              <a:t>관리됩니다</a:t>
+            </a:r>
+            <a:r>
+              <a:rPr lang="en-US" altLang="ko-KR" sz="1500" dirty="0">
+                <a:solidFill>
+                  <a:srgbClr val="5C7088"/>
+                </a:solidFill>
+                <a:latin typeface="맑은 고딕" pitchFamily="34" charset="0"/>
+                <a:ea typeface="맑은 고딕" pitchFamily="34" charset="-122"/>
+                <a:cs typeface="맑은 고딕" pitchFamily="34" charset="-120"/>
+              </a:rPr>
+              <a:t>.</a:t>
+            </a:r>
+          </a:p>
+          <a:p>
+            <a:pPr marL="0" indent="0">
+              <a:buNone/>
+            </a:pPr>
+            <a:r>
+              <a:rPr lang="ko-KR" altLang="en-US" sz="1500" dirty="0">
+                <a:solidFill>
+                  <a:srgbClr val="5C7088"/>
+                </a:solidFill>
+                <a:latin typeface="맑은 고딕" pitchFamily="34" charset="0"/>
+                <a:ea typeface="맑은 고딕" pitchFamily="34" charset="-122"/>
+                <a:cs typeface="맑은 고딕" pitchFamily="34" charset="-120"/>
+              </a:rPr>
+              <a:t>화장실 데이터는 서울 특별시 공중화장실 위치 정보</a:t>
+            </a:r>
+            <a:r>
+              <a:rPr lang="en-US" altLang="ko-KR" sz="1500" dirty="0">
+                <a:solidFill>
+                  <a:srgbClr val="5C7088"/>
+                </a:solidFill>
+                <a:latin typeface="맑은 고딕" pitchFamily="34" charset="0"/>
+                <a:ea typeface="맑은 고딕" pitchFamily="34" charset="-122"/>
+                <a:cs typeface="맑은 고딕" pitchFamily="34" charset="-120"/>
+              </a:rPr>
+              <a:t>(</a:t>
+            </a:r>
+            <a:r>
+              <a:rPr lang="en-US" altLang="ko-KR" sz="1500" dirty="0">
+                <a:solidFill>
+                  <a:srgbClr val="5C7088"/>
+                </a:solidFill>
+                <a:latin typeface="맑은 고딕" pitchFamily="34" charset="0"/>
+                <a:ea typeface="맑은 고딕" pitchFamily="34" charset="-122"/>
+                <a:cs typeface="맑은 고딕" pitchFamily="34" charset="-120"/>
+                <a:hlinkClick r:id="rId3"/>
+              </a:rPr>
+              <a:t>https://www.data.go.kr/data/15146086/fileData.do)</a:t>
+            </a:r>
+            <a:r>
+              <a:rPr lang="ko-KR" altLang="en-US" sz="1500" dirty="0">
+                <a:solidFill>
+                  <a:srgbClr val="5C7088"/>
+                </a:solidFill>
+                <a:latin typeface="맑은 고딕" pitchFamily="34" charset="0"/>
+                <a:ea typeface="맑은 고딕" pitchFamily="34" charset="-122"/>
+                <a:cs typeface="맑은 고딕" pitchFamily="34" charset="-120"/>
+                <a:hlinkClick r:id="rId3"/>
+              </a:rPr>
+              <a:t> </a:t>
+            </a:r>
+            <a:r>
+              <a:rPr lang="ko-KR" altLang="en-US" sz="1500" dirty="0">
+                <a:solidFill>
+                  <a:srgbClr val="5C7088"/>
+                </a:solidFill>
+                <a:latin typeface="맑은 고딕" pitchFamily="34" charset="0"/>
+                <a:ea typeface="맑은 고딕" pitchFamily="34" charset="-122"/>
+                <a:cs typeface="맑은 고딕" pitchFamily="34" charset="-120"/>
+              </a:rPr>
+              <a:t>에서 가져옵니다</a:t>
+            </a:r>
+            <a:r>
+              <a:rPr lang="en-US" altLang="ko-KR" sz="1500" dirty="0">
+                <a:solidFill>
+                  <a:srgbClr val="5C7088"/>
+                </a:solidFill>
+                <a:latin typeface="맑은 고딕" pitchFamily="34" charset="0"/>
+                <a:ea typeface="맑은 고딕" pitchFamily="34" charset="-122"/>
+                <a:cs typeface="맑은 고딕" pitchFamily="34" charset="-120"/>
+              </a:rPr>
+              <a:t>.</a:t>
+            </a:r>
+            <a:endParaRPr lang="en-US" sz="1500" dirty="0">
+              <a:solidFill>
+                <a:srgbClr val="5C7088"/>
+              </a:solidFill>
+              <a:latin typeface="맑은 고딕" pitchFamily="34" charset="0"/>
+              <a:ea typeface="맑은 고딕" pitchFamily="34" charset="-122"/>
+              <a:cs typeface="맑은 고딕" pitchFamily="34" charset="-120"/>
+            </a:endParaRPr>
           </a:p>
         </p:txBody>
       </p:sp>
@@ -5216,7 +5497,7 @@
         <p:spPr>
           <a:xfrm>
             <a:off x="548640" y="2240280"/>
-            <a:ext cx="6126480" cy="3794760"/>
+            <a:ext cx="5486400" cy="3794760"/>
           </a:xfrm>
           <a:prstGeom prst="roundRect">
             <a:avLst>
@@ -5239,7 +5520,7 @@
           <a:bodyPr/>
           <a:lstStyle/>
           <a:p>
-            <a:endParaRPr lang="ko-KR" altLang="en-US"/>
+            <a:endParaRPr lang="ko-KR" altLang="en-US" dirty="0"/>
           </a:p>
         </p:txBody>
       </p:sp>
@@ -5319,7 +5600,51 @@
                 <a:ea typeface="Consolas" pitchFamily="34" charset="-122"/>
                 <a:cs typeface="Consolas" pitchFamily="34" charset="-120"/>
               </a:rPr>
-              <a:t>    lat: 37.4984, lng: 127.0260,</a:t>
+              <a:t>    </a:t>
+            </a:r>
+            <a:r>
+              <a:rPr lang="en-US" sz="1400" dirty="0">
+                <a:solidFill>
+                  <a:srgbClr val="FFFF00"/>
+                </a:solidFill>
+                <a:latin typeface="Consolas" pitchFamily="34" charset="0"/>
+                <a:ea typeface="Consolas" pitchFamily="34" charset="-122"/>
+                <a:cs typeface="Consolas" pitchFamily="34" charset="-120"/>
+              </a:rPr>
+              <a:t>lat</a:t>
+            </a:r>
+            <a:r>
+              <a:rPr lang="en-US" sz="1400" dirty="0">
+                <a:solidFill>
+                  <a:srgbClr val="CFE3FF"/>
+                </a:solidFill>
+                <a:latin typeface="Consolas" pitchFamily="34" charset="0"/>
+                <a:ea typeface="Consolas" pitchFamily="34" charset="-122"/>
+                <a:cs typeface="Consolas" pitchFamily="34" charset="-120"/>
+              </a:rPr>
+              <a:t>: 37.4984, </a:t>
+            </a:r>
+            <a:r>
+              <a:rPr lang="en-US" sz="1400" dirty="0">
+                <a:solidFill>
+                  <a:srgbClr val="FFFF00"/>
+                </a:solidFill>
+                <a:latin typeface="Consolas" pitchFamily="34" charset="0"/>
+                <a:ea typeface="Consolas" pitchFamily="34" charset="-122"/>
+                <a:cs typeface="Consolas" pitchFamily="34" charset="-120"/>
+              </a:rPr>
+              <a:t>lng</a:t>
+            </a:r>
+            <a:r>
+              <a:rPr lang="en-US" sz="1400" dirty="0">
+                <a:solidFill>
+                  <a:srgbClr val="CFE3FF"/>
+                </a:solidFill>
+                <a:latin typeface="Consolas" pitchFamily="34" charset="0"/>
+                <a:ea typeface="Consolas" pitchFamily="34" charset="-122"/>
+                <a:cs typeface="Consolas" pitchFamily="34" charset="-120"/>
+              </a:rPr>
+              <a:t>: 127.0260,</a:t>
             </a:r>
             <a:endParaRPr lang="en-US" sz="1400" dirty="0"/>
           </a:p>
@@ -5339,7 +5664,73 @@
                 <a:ea typeface="Consolas" pitchFamily="34" charset="-122"/>
                 <a:cs typeface="Consolas" pitchFamily="34" charset="-120"/>
               </a:rPr>
-              <a:t>    type: "public",  rating: 4.2, reviews: 38,</a:t>
+              <a:t>   </a:t>
+            </a:r>
+            <a:r>
+              <a:rPr lang="en-US" sz="1400" dirty="0">
+                <a:solidFill>
+                  <a:srgbClr val="FFFF00"/>
+                </a:solidFill>
+                <a:latin typeface="Consolas" pitchFamily="34" charset="0"/>
+                <a:ea typeface="Consolas" pitchFamily="34" charset="-122"/>
+                <a:cs typeface="Consolas" pitchFamily="34" charset="-120"/>
+              </a:rPr>
+              <a:t> type</a:t>
+            </a:r>
+            <a:r>
+              <a:rPr lang="en-US" sz="1400" dirty="0">
+                <a:solidFill>
+                  <a:srgbClr val="CFE3FF"/>
+                </a:solidFill>
+                <a:latin typeface="Consolas" pitchFamily="34" charset="0"/>
+                <a:ea typeface="Consolas" pitchFamily="34" charset="-122"/>
+                <a:cs typeface="Consolas" pitchFamily="34" charset="-120"/>
+              </a:rPr>
+              <a:t>: "public",  </a:t>
+            </a:r>
+            <a:r>
+              <a:rPr lang="en-US" sz="1400" dirty="0">
+                <a:solidFill>
+                  <a:srgbClr val="FFFF00"/>
+                </a:solidFill>
+                <a:latin typeface="Consolas" pitchFamily="34" charset="0"/>
+                <a:ea typeface="Consolas" pitchFamily="34" charset="-122"/>
+                <a:cs typeface="Consolas" pitchFamily="34" charset="-120"/>
+              </a:rPr>
+              <a:t>rating</a:t>
+            </a:r>
+            <a:r>
+              <a:rPr lang="en-US" sz="1400" dirty="0">
+                <a:solidFill>
+                  <a:srgbClr val="CFE3FF"/>
+                </a:solidFill>
+                <a:latin typeface="Consolas" pitchFamily="34" charset="0"/>
+                <a:ea typeface="Consolas" pitchFamily="34" charset="-122"/>
+                <a:cs typeface="Consolas" pitchFamily="34" charset="-120"/>
+              </a:rPr>
+              <a:t>: 4.2, </a:t>
+            </a:r>
+            <a:r>
+              <a:rPr lang="en-US" sz="1400" dirty="0">
+                <a:solidFill>
+                  <a:srgbClr val="FFFF00"/>
+                </a:solidFill>
+                <a:latin typeface="Consolas" pitchFamily="34" charset="0"/>
+                <a:ea typeface="Consolas" pitchFamily="34" charset="-122"/>
+                <a:cs typeface="Consolas" pitchFamily="34" charset="-120"/>
+              </a:rPr>
+              <a:t>reviews</a:t>
+            </a:r>
+            <a:r>
+              <a:rPr lang="en-US" sz="1400" dirty="0">
+                <a:solidFill>
+                  <a:srgbClr val="CFE3FF"/>
+                </a:solidFill>
+                <a:latin typeface="Consolas" pitchFamily="34" charset="0"/>
+                <a:ea typeface="Consolas" pitchFamily="34" charset="-122"/>
+                <a:cs typeface="Consolas" pitchFamily="34" charset="-120"/>
+              </a:rPr>
+              <a:t>: 38,</a:t>
             </a:r>
             <a:endParaRPr lang="en-US" sz="1400" dirty="0"/>
           </a:p>
@@ -5359,7 +5750,73 @@
                 <a:ea typeface="Consolas" pitchFamily="34" charset="-122"/>
                 <a:cs typeface="Consolas" pitchFamily="34" charset="-120"/>
               </a:rPr>
-              <a:t>    bidet: true, open24h: true, disabled: true,</a:t>
+              <a:t>    </a:t>
+            </a:r>
+            <a:r>
+              <a:rPr lang="en-US" sz="1400" dirty="0">
+                <a:solidFill>
+                  <a:srgbClr val="FFFF00"/>
+                </a:solidFill>
+                <a:latin typeface="Consolas" pitchFamily="34" charset="0"/>
+                <a:ea typeface="Consolas" pitchFamily="34" charset="-122"/>
+                <a:cs typeface="Consolas" pitchFamily="34" charset="-120"/>
+              </a:rPr>
+              <a:t>bidet</a:t>
+            </a:r>
+            <a:r>
+              <a:rPr lang="en-US" sz="1400" dirty="0">
+                <a:solidFill>
+                  <a:srgbClr val="CFE3FF"/>
+                </a:solidFill>
+                <a:latin typeface="Consolas" pitchFamily="34" charset="0"/>
+                <a:ea typeface="Consolas" pitchFamily="34" charset="-122"/>
+                <a:cs typeface="Consolas" pitchFamily="34" charset="-120"/>
+              </a:rPr>
+              <a:t>: true, </a:t>
+            </a:r>
+            <a:r>
+              <a:rPr lang="en-US" sz="1400" dirty="0">
+                <a:solidFill>
+                  <a:srgbClr val="FFFF00"/>
+                </a:solidFill>
+                <a:latin typeface="Consolas" pitchFamily="34" charset="0"/>
+                <a:ea typeface="Consolas" pitchFamily="34" charset="-122"/>
+                <a:cs typeface="Consolas" pitchFamily="34" charset="-120"/>
+              </a:rPr>
+              <a:t>open24h</a:t>
+            </a:r>
+            <a:r>
+              <a:rPr lang="en-US" sz="1400" dirty="0">
+                <a:solidFill>
+                  <a:srgbClr val="CFE3FF"/>
+                </a:solidFill>
+                <a:latin typeface="Consolas" pitchFamily="34" charset="0"/>
+                <a:ea typeface="Consolas" pitchFamily="34" charset="-122"/>
+                <a:cs typeface="Consolas" pitchFamily="34" charset="-120"/>
+              </a:rPr>
+              <a:t>: true, </a:t>
+            </a:r>
+            <a:r>
+              <a:rPr lang="en-US" sz="1400" dirty="0">
+                <a:solidFill>
+                  <a:srgbClr val="FFFF00"/>
+                </a:solidFill>
+                <a:latin typeface="Consolas" pitchFamily="34" charset="0"/>
+                <a:ea typeface="Consolas" pitchFamily="34" charset="-122"/>
+                <a:cs typeface="Consolas" pitchFamily="34" charset="-120"/>
+              </a:rPr>
+              <a:t>disabled</a:t>
+            </a:r>
+            <a:r>
+              <a:rPr lang="en-US" sz="1400" dirty="0">
+                <a:solidFill>
+                  <a:srgbClr val="CFE3FF"/>
+                </a:solidFill>
+                <a:latin typeface="Consolas" pitchFamily="34" charset="0"/>
+                <a:ea typeface="Consolas" pitchFamily="34" charset="-122"/>
+                <a:cs typeface="Consolas" pitchFamily="34" charset="-120"/>
+              </a:rPr>
+              <a:t>: true,</a:t>
             </a:r>
             <a:endParaRPr lang="en-US" sz="1400" dirty="0"/>
           </a:p>
@@ -5379,7 +5836,73 @@
                 <a:ea typeface="Consolas" pitchFamily="34" charset="-122"/>
                 <a:cs typeface="Consolas" pitchFamily="34" charset="-120"/>
               </a:rPr>
-              <a:t>    clean: 85, stalls: 6, loc: "지하 1층" },</a:t>
+              <a:t>    </a:t>
+            </a:r>
+            <a:r>
+              <a:rPr lang="en-US" sz="1400" dirty="0">
+                <a:solidFill>
+                  <a:srgbClr val="FFFF00"/>
+                </a:solidFill>
+                <a:latin typeface="Consolas" pitchFamily="34" charset="0"/>
+                <a:ea typeface="Consolas" pitchFamily="34" charset="-122"/>
+                <a:cs typeface="Consolas" pitchFamily="34" charset="-120"/>
+              </a:rPr>
+              <a:t>clean</a:t>
+            </a:r>
+            <a:r>
+              <a:rPr lang="en-US" sz="1400" dirty="0">
+                <a:solidFill>
+                  <a:srgbClr val="CFE3FF"/>
+                </a:solidFill>
+                <a:latin typeface="Consolas" pitchFamily="34" charset="0"/>
+                <a:ea typeface="Consolas" pitchFamily="34" charset="-122"/>
+                <a:cs typeface="Consolas" pitchFamily="34" charset="-120"/>
+              </a:rPr>
+              <a:t>: 85, </a:t>
+            </a:r>
+            <a:r>
+              <a:rPr lang="en-US" sz="1400" dirty="0">
+                <a:solidFill>
+                  <a:srgbClr val="FFFF00"/>
+                </a:solidFill>
+                <a:latin typeface="Consolas" pitchFamily="34" charset="0"/>
+                <a:ea typeface="Consolas" pitchFamily="34" charset="-122"/>
+                <a:cs typeface="Consolas" pitchFamily="34" charset="-120"/>
+              </a:rPr>
+              <a:t>stalls</a:t>
+            </a:r>
+            <a:r>
+              <a:rPr lang="en-US" sz="1400" dirty="0">
+                <a:solidFill>
+                  <a:srgbClr val="CFE3FF"/>
+                </a:solidFill>
+                <a:latin typeface="Consolas" pitchFamily="34" charset="0"/>
+                <a:ea typeface="Consolas" pitchFamily="34" charset="-122"/>
+                <a:cs typeface="Consolas" pitchFamily="34" charset="-120"/>
+              </a:rPr>
+              <a:t>: 6, </a:t>
+            </a:r>
+            <a:r>
+              <a:rPr lang="en-US" sz="1400" dirty="0">
+                <a:solidFill>
+                  <a:srgbClr val="FFFF00"/>
+                </a:solidFill>
+                <a:latin typeface="Consolas" pitchFamily="34" charset="0"/>
+                <a:ea typeface="Consolas" pitchFamily="34" charset="-122"/>
+                <a:cs typeface="Consolas" pitchFamily="34" charset="-120"/>
+              </a:rPr>
+              <a:t>loc</a:t>
+            </a:r>
+            <a:r>
+              <a:rPr lang="en-US" sz="1400" dirty="0">
+                <a:solidFill>
+                  <a:srgbClr val="CFE3FF"/>
+                </a:solidFill>
+                <a:latin typeface="Consolas" pitchFamily="34" charset="0"/>
+                <a:ea typeface="Consolas" pitchFamily="34" charset="-122"/>
+                <a:cs typeface="Consolas" pitchFamily="34" charset="-120"/>
+              </a:rPr>
+              <a:t>: "지하 1층" },</a:t>
             </a:r>
             <a:endParaRPr lang="en-US" sz="1400" dirty="0"/>
           </a:p>
@@ -5399,7 +5922,51 @@
                 <a:ea typeface="Consolas" pitchFamily="34" charset="-122"/>
                 <a:cs typeface="Consolas" pitchFamily="34" charset="-120"/>
               </a:rPr>
-              <a:t>  // ... 서울 전역 70여 곳의 화장실 데이터</a:t>
+              <a:t>  // ... 서울 </a:t>
+            </a:r>
+            <a:r>
+              <a:rPr lang="en-US" sz="1400" dirty="0" err="1">
+                <a:solidFill>
+                  <a:srgbClr val="CFE3FF"/>
+                </a:solidFill>
+                <a:latin typeface="Consolas" pitchFamily="34" charset="0"/>
+                <a:ea typeface="Consolas" pitchFamily="34" charset="-122"/>
+                <a:cs typeface="Consolas" pitchFamily="34" charset="-120"/>
+              </a:rPr>
+              <a:t>전역</a:t>
+            </a:r>
+            <a:r>
+              <a:rPr lang="en-US" sz="1400" dirty="0">
+                <a:solidFill>
+                  <a:srgbClr val="CFE3FF"/>
+                </a:solidFill>
+                <a:latin typeface="Consolas" pitchFamily="34" charset="0"/>
+                <a:ea typeface="Consolas" pitchFamily="34" charset="-122"/>
+                <a:cs typeface="Consolas" pitchFamily="34" charset="-120"/>
+              </a:rPr>
+              <a:t> </a:t>
+            </a:r>
+            <a:r>
+              <a:rPr lang="en-US" altLang="ko-KR" sz="1400" dirty="0">
+                <a:solidFill>
+                  <a:srgbClr val="CFE3FF"/>
+                </a:solidFill>
+                <a:latin typeface="Consolas" pitchFamily="34" charset="0"/>
+                <a:ea typeface="Consolas" pitchFamily="34" charset="-122"/>
+                <a:cs typeface="Consolas" pitchFamily="34" charset="-120"/>
+              </a:rPr>
+              <a:t>4000</a:t>
+            </a:r>
+            <a:r>
+              <a:rPr lang="en-US" sz="1400" dirty="0">
+                <a:solidFill>
+                  <a:srgbClr val="CFE3FF"/>
+                </a:solidFill>
+                <a:latin typeface="Consolas" pitchFamily="34" charset="0"/>
+                <a:ea typeface="Consolas" pitchFamily="34" charset="-122"/>
+                <a:cs typeface="Consolas" pitchFamily="34" charset="-120"/>
+              </a:rPr>
+              <a:t>여 곳의 화장실 데이터</a:t>
             </a:r>
             <a:endParaRPr lang="en-US" sz="1400" dirty="0"/>
           </a:p>
@@ -5433,7 +6000,7 @@
         </p:nvSpPr>
         <p:spPr>
           <a:xfrm>
-            <a:off x="6949440" y="2340864"/>
+            <a:off x="6400800" y="2121408"/>
             <a:ext cx="146304" cy="146304"/>
           </a:xfrm>
           <a:prstGeom prst="ellipse">
@@ -5460,7 +6027,7 @@
         </p:nvSpPr>
         <p:spPr>
           <a:xfrm>
-            <a:off x="7223760" y="2212848"/>
+            <a:off x="6675120" y="1993392"/>
             <a:ext cx="4206240" cy="320040"/>
           </a:xfrm>
           <a:prstGeom prst="rect">
@@ -5499,7 +6066,7 @@
         </p:nvSpPr>
         <p:spPr>
           <a:xfrm>
-            <a:off x="7223760" y="2532888"/>
+            <a:off x="6675120" y="2313432"/>
             <a:ext cx="4297680" cy="502920"/>
           </a:xfrm>
           <a:prstGeom prst="rect">
@@ -5541,7 +6108,7 @@
         </p:nvSpPr>
         <p:spPr>
           <a:xfrm>
-            <a:off x="6949440" y="3118104"/>
+            <a:off x="6400800" y="2898648"/>
             <a:ext cx="146304" cy="146304"/>
           </a:xfrm>
           <a:prstGeom prst="ellipse">
@@ -5568,7 +6135,7 @@
         </p:nvSpPr>
         <p:spPr>
           <a:xfrm>
-            <a:off x="7223760" y="2990088"/>
+            <a:off x="6675120" y="2770632"/>
             <a:ext cx="4206240" cy="320040"/>
           </a:xfrm>
           <a:prstGeom prst="rect">
@@ -5607,7 +6174,7 @@
         </p:nvSpPr>
         <p:spPr>
           <a:xfrm>
-            <a:off x="7223760" y="3310128"/>
+            <a:off x="6675120" y="3090672"/>
             <a:ext cx="4297680" cy="502920"/>
           </a:xfrm>
           <a:prstGeom prst="rect">
@@ -5649,7 +6216,7 @@
         </p:nvSpPr>
         <p:spPr>
           <a:xfrm>
-            <a:off x="6949440" y="3895344"/>
+            <a:off x="6400800" y="3675888"/>
             <a:ext cx="146304" cy="146304"/>
           </a:xfrm>
           <a:prstGeom prst="ellipse">
@@ -5676,7 +6243,7 @@
         </p:nvSpPr>
         <p:spPr>
           <a:xfrm>
-            <a:off x="7223760" y="3767328"/>
+            <a:off x="6675120" y="3547872"/>
             <a:ext cx="4206240" cy="320040"/>
           </a:xfrm>
           <a:prstGeom prst="rect">
@@ -5715,7 +6282,7 @@
         </p:nvSpPr>
         <p:spPr>
           <a:xfrm>
-            <a:off x="7223760" y="4087368"/>
+            <a:off x="6675120" y="3867912"/>
             <a:ext cx="4297680" cy="502920"/>
           </a:xfrm>
           <a:prstGeom prst="rect">
@@ -5757,7 +6324,7 @@
         </p:nvSpPr>
         <p:spPr>
           <a:xfrm>
-            <a:off x="6949440" y="4672584"/>
+            <a:off x="6400800" y="4453128"/>
             <a:ext cx="146304" cy="146304"/>
           </a:xfrm>
           <a:prstGeom prst="ellipse">
@@ -5784,7 +6351,7 @@
         </p:nvSpPr>
         <p:spPr>
           <a:xfrm>
-            <a:off x="7223760" y="4544568"/>
+            <a:off x="6675120" y="4325112"/>
             <a:ext cx="4206240" cy="320040"/>
           </a:xfrm>
           <a:prstGeom prst="rect">
@@ -5823,7 +6390,7 @@
         </p:nvSpPr>
         <p:spPr>
           <a:xfrm>
-            <a:off x="7223760" y="4864608"/>
+            <a:off x="6675120" y="4645152"/>
             <a:ext cx="4297680" cy="502920"/>
           </a:xfrm>
           <a:prstGeom prst="rect">
@@ -5865,7 +6432,7 @@
         </p:nvSpPr>
         <p:spPr>
           <a:xfrm>
-            <a:off x="6949440" y="5449824"/>
+            <a:off x="6400800" y="5230368"/>
             <a:ext cx="146304" cy="146304"/>
           </a:xfrm>
           <a:prstGeom prst="ellipse">
@@ -5892,7 +6459,7 @@
         </p:nvSpPr>
         <p:spPr>
           <a:xfrm>
-            <a:off x="7223760" y="5321808"/>
+            <a:off x="6675120" y="5102352"/>
             <a:ext cx="4206240" cy="320040"/>
           </a:xfrm>
           <a:prstGeom prst="rect">
@@ -5931,7 +6498,7 @@
         </p:nvSpPr>
         <p:spPr>
           <a:xfrm>
-            <a:off x="7223760" y="5641848"/>
+            <a:off x="6675120" y="5422392"/>
             <a:ext cx="4297680" cy="502920"/>
           </a:xfrm>
           <a:prstGeom prst="rect">
@@ -5973,8 +6540,8 @@
         </p:nvSpPr>
         <p:spPr>
           <a:xfrm>
-            <a:off x="6949440" y="6217920"/>
-            <a:ext cx="4572000" cy="868680"/>
+            <a:off x="6333018" y="5857346"/>
+            <a:ext cx="5090158" cy="868680"/>
           </a:xfrm>
           <a:prstGeom prst="rect">
             <a:avLst/>
@@ -5992,7 +6559,7 @@
               <a:buNone/>
             </a:pPr>
             <a:r>
-              <a:rPr lang="en-US" sz="1200" i="1" dirty="0">
+              <a:rPr lang="en-US" sz="1200" dirty="0">
                 <a:solidFill>
                   <a:srgbClr val="1B3A63"/>
                 </a:solidFill>
@@ -6009,7 +6576,7 @@
               <a:buNone/>
             </a:pPr>
             <a:r>
-              <a:rPr lang="en-US" sz="1200" i="1" dirty="0">
+              <a:rPr lang="en-US" sz="1200" dirty="0">
                 <a:solidFill>
                   <a:srgbClr val="1B3A63"/>
                 </a:solidFill>
@@ -6206,7 +6773,73 @@
                 <a:ea typeface="맑은 고딕" pitchFamily="34" charset="-122"/>
                 <a:cs typeface="맑은 고딕" pitchFamily="34" charset="-120"/>
               </a:rPr>
-              <a:t>Leaflet의 divIcon으로 직접 그린 HTML 마커를 화장실 종류별 색상으로 구분합니다</a:t>
+              <a:t>Leaflet의 </a:t>
+            </a:r>
+            <a:r>
+              <a:rPr lang="en-US" sz="1500" dirty="0" err="1">
+                <a:solidFill>
+                  <a:srgbClr val="5C7088"/>
+                </a:solidFill>
+                <a:latin typeface="맑은 고딕" pitchFamily="34" charset="0"/>
+                <a:ea typeface="맑은 고딕" pitchFamily="34" charset="-122"/>
+                <a:cs typeface="맑은 고딕" pitchFamily="34" charset="-120"/>
+              </a:rPr>
+              <a:t>divIcon으로</a:t>
+            </a:r>
+            <a:r>
+              <a:rPr lang="en-US" sz="1500" dirty="0">
+                <a:solidFill>
+                  <a:srgbClr val="5C7088"/>
+                </a:solidFill>
+                <a:latin typeface="맑은 고딕" pitchFamily="34" charset="0"/>
+                <a:ea typeface="맑은 고딕" pitchFamily="34" charset="-122"/>
+                <a:cs typeface="맑은 고딕" pitchFamily="34" charset="-120"/>
+              </a:rPr>
+              <a:t> HTML 마커를 화장실 종류별 </a:t>
+            </a:r>
+            <a:r>
+              <a:rPr lang="en-US" sz="1500" dirty="0" err="1">
+                <a:solidFill>
+                  <a:srgbClr val="5C7088"/>
+                </a:solidFill>
+                <a:latin typeface="맑은 고딕" pitchFamily="34" charset="0"/>
+                <a:ea typeface="맑은 고딕" pitchFamily="34" charset="-122"/>
+                <a:cs typeface="맑은 고딕" pitchFamily="34" charset="-120"/>
+              </a:rPr>
+              <a:t>색상으로</a:t>
+            </a:r>
+            <a:r>
+              <a:rPr lang="en-US" sz="1500" dirty="0">
+                <a:solidFill>
+                  <a:srgbClr val="5C7088"/>
+                </a:solidFill>
+                <a:latin typeface="맑은 고딕" pitchFamily="34" charset="0"/>
+                <a:ea typeface="맑은 고딕" pitchFamily="34" charset="-122"/>
+                <a:cs typeface="맑은 고딕" pitchFamily="34" charset="-120"/>
+              </a:rPr>
+              <a:t> </a:t>
+            </a:r>
+            <a:r>
+              <a:rPr lang="en-US" sz="1500" dirty="0" err="1">
+                <a:solidFill>
+                  <a:srgbClr val="5C7088"/>
+                </a:solidFill>
+                <a:latin typeface="맑은 고딕" pitchFamily="34" charset="0"/>
+                <a:ea typeface="맑은 고딕" pitchFamily="34" charset="-122"/>
+                <a:cs typeface="맑은 고딕" pitchFamily="34" charset="-120"/>
+              </a:rPr>
+              <a:t>구분합니다</a:t>
+            </a:r>
+            <a:r>
+              <a:rPr lang="en-US" altLang="ko-KR" sz="1500" dirty="0">
+                <a:solidFill>
+                  <a:srgbClr val="5C7088"/>
+                </a:solidFill>
+                <a:latin typeface="맑은 고딕" pitchFamily="34" charset="0"/>
+                <a:ea typeface="맑은 고딕" pitchFamily="34" charset="-122"/>
+                <a:cs typeface="맑은 고딕" pitchFamily="34" charset="-120"/>
+              </a:rPr>
+              <a:t>.</a:t>
             </a:r>
             <a:endParaRPr lang="en-US" sz="1500" dirty="0"/>
           </a:p>
@@ -6284,7 +6917,29 @@
                 <a:ea typeface="Consolas" pitchFamily="34" charset="-122"/>
                 <a:cs typeface="Consolas" pitchFamily="34" charset="-120"/>
               </a:rPr>
-              <a:t>function toiletIcon(type, beta) {</a:t>
+              <a:t>function </a:t>
+            </a:r>
+            <a:r>
+              <a:rPr lang="en-US" sz="1300" dirty="0">
+                <a:solidFill>
+                  <a:srgbClr val="FFFF00"/>
+                </a:solidFill>
+                <a:latin typeface="Consolas" pitchFamily="34" charset="0"/>
+                <a:ea typeface="Consolas" pitchFamily="34" charset="-122"/>
+                <a:cs typeface="Consolas" pitchFamily="34" charset="-120"/>
+              </a:rPr>
+              <a:t>toiletIcon</a:t>
+            </a:r>
+            <a:r>
+              <a:rPr lang="en-US" sz="1300" dirty="0">
+                <a:solidFill>
+                  <a:srgbClr val="CFE3FF"/>
+                </a:solidFill>
+                <a:latin typeface="Consolas" pitchFamily="34" charset="0"/>
+                <a:ea typeface="Consolas" pitchFamily="34" charset="-122"/>
+                <a:cs typeface="Consolas" pitchFamily="34" charset="-120"/>
+              </a:rPr>
+              <a:t>(type, beta) {</a:t>
             </a:r>
             <a:endParaRPr lang="en-US" sz="1300" dirty="0"/>
           </a:p>
@@ -6976,7 +7631,51 @@
                 <a:ea typeface="맑은 고딕" pitchFamily="34" charset="-122"/>
                 <a:cs typeface="맑은 고딕" pitchFamily="34" charset="-120"/>
               </a:rPr>
-              <a:t>Geolocation API로 GPS 좌표를 받고, 하버사인(Haversine) 공식으로 두 지점 사이 거리를 계산합니다</a:t>
+              <a:t>Geolocation API로 GPS 좌표를 받고, 하버사인(Haversine) 공식으로 두 지점 사이 </a:t>
+            </a:r>
+            <a:r>
+              <a:rPr lang="en-US" sz="1500" dirty="0" err="1">
+                <a:solidFill>
+                  <a:srgbClr val="5C7088"/>
+                </a:solidFill>
+                <a:latin typeface="맑은 고딕" pitchFamily="34" charset="0"/>
+                <a:ea typeface="맑은 고딕" pitchFamily="34" charset="-122"/>
+                <a:cs typeface="맑은 고딕" pitchFamily="34" charset="-120"/>
+              </a:rPr>
+              <a:t>거리를</a:t>
+            </a:r>
+            <a:r>
+              <a:rPr lang="en-US" sz="1500" dirty="0">
+                <a:solidFill>
+                  <a:srgbClr val="5C7088"/>
+                </a:solidFill>
+                <a:latin typeface="맑은 고딕" pitchFamily="34" charset="0"/>
+                <a:ea typeface="맑은 고딕" pitchFamily="34" charset="-122"/>
+                <a:cs typeface="맑은 고딕" pitchFamily="34" charset="-120"/>
+              </a:rPr>
+              <a:t> </a:t>
+            </a:r>
+            <a:r>
+              <a:rPr lang="en-US" sz="1500" dirty="0" err="1">
+                <a:solidFill>
+                  <a:srgbClr val="5C7088"/>
+                </a:solidFill>
+                <a:latin typeface="맑은 고딕" pitchFamily="34" charset="0"/>
+                <a:ea typeface="맑은 고딕" pitchFamily="34" charset="-122"/>
+                <a:cs typeface="맑은 고딕" pitchFamily="34" charset="-120"/>
+              </a:rPr>
+              <a:t>계산합니다</a:t>
+            </a:r>
+            <a:r>
+              <a:rPr lang="en-US" altLang="ko-KR" sz="1500" dirty="0">
+                <a:solidFill>
+                  <a:srgbClr val="5C7088"/>
+                </a:solidFill>
+                <a:latin typeface="맑은 고딕" pitchFamily="34" charset="0"/>
+                <a:ea typeface="맑은 고딕" pitchFamily="34" charset="-122"/>
+                <a:cs typeface="맑은 고딕" pitchFamily="34" charset="-120"/>
+              </a:rPr>
+              <a:t>.</a:t>
             </a:r>
             <a:endParaRPr lang="en-US" sz="1500" dirty="0"/>
           </a:p>
@@ -7054,7 +7753,29 @@
                 <a:ea typeface="Consolas" pitchFamily="34" charset="-122"/>
                 <a:cs typeface="Consolas" pitchFamily="34" charset="-120"/>
               </a:rPr>
-              <a:t>function dist(a, b, c, d) {</a:t>
+              <a:t>function </a:t>
+            </a:r>
+            <a:r>
+              <a:rPr lang="en-US" sz="1300" dirty="0">
+                <a:solidFill>
+                  <a:srgbClr val="FFFF00"/>
+                </a:solidFill>
+                <a:latin typeface="Consolas" pitchFamily="34" charset="0"/>
+                <a:ea typeface="Consolas" pitchFamily="34" charset="-122"/>
+                <a:cs typeface="Consolas" pitchFamily="34" charset="-120"/>
+              </a:rPr>
+              <a:t>dist</a:t>
+            </a:r>
+            <a:r>
+              <a:rPr lang="en-US" sz="1300" dirty="0">
+                <a:solidFill>
+                  <a:srgbClr val="CFE3FF"/>
+                </a:solidFill>
+                <a:latin typeface="Consolas" pitchFamily="34" charset="0"/>
+                <a:ea typeface="Consolas" pitchFamily="34" charset="-122"/>
+                <a:cs typeface="Consolas" pitchFamily="34" charset="-120"/>
+              </a:rPr>
+              <a:t>(a, b, c, d) {</a:t>
             </a:r>
             <a:endParaRPr lang="en-US" sz="1300" dirty="0"/>
           </a:p>
@@ -7214,7 +7935,29 @@
                 <a:ea typeface="Consolas" pitchFamily="34" charset="-122"/>
                 <a:cs typeface="Consolas" pitchFamily="34" charset="-120"/>
               </a:rPr>
-              <a:t>function fmtD(m){ return m&lt;1000 ? `${Math.round(m)}m`</a:t>
+              <a:t>function </a:t>
+            </a:r>
+            <a:r>
+              <a:rPr lang="en-US" sz="1300" dirty="0">
+                <a:solidFill>
+                  <a:srgbClr val="FFFF00"/>
+                </a:solidFill>
+                <a:latin typeface="Consolas" pitchFamily="34" charset="0"/>
+                <a:ea typeface="Consolas" pitchFamily="34" charset="-122"/>
+                <a:cs typeface="Consolas" pitchFamily="34" charset="-120"/>
+              </a:rPr>
+              <a:t>fmtD</a:t>
+            </a:r>
+            <a:r>
+              <a:rPr lang="en-US" sz="1300" dirty="0">
+                <a:solidFill>
+                  <a:srgbClr val="CFE3FF"/>
+                </a:solidFill>
+                <a:latin typeface="Consolas" pitchFamily="34" charset="0"/>
+                <a:ea typeface="Consolas" pitchFamily="34" charset="-122"/>
+                <a:cs typeface="Consolas" pitchFamily="34" charset="-120"/>
+              </a:rPr>
+              <a:t>(m){ return m&lt;1000 ? `${Math.round(m)}m`</a:t>
             </a:r>
             <a:endParaRPr lang="en-US" sz="1300" dirty="0"/>
           </a:p>
@@ -7318,7 +8061,51 @@
                 <a:ea typeface="맑은 고딕" pitchFamily="34" charset="-122"/>
                 <a:cs typeface="맑은 고딕" pitchFamily="34" charset="-120"/>
               </a:rPr>
-              <a:t>지도 위 ‘펄싱 블루 닷’으로 현재 위치를 표시 (HTTPS 환경, 즉 GitHub Pages에서만 정상 동작)</a:t>
+              <a:t>지도 </a:t>
+            </a:r>
+            <a:r>
+              <a:rPr lang="en-US" sz="1300" dirty="0" err="1">
+                <a:solidFill>
+                  <a:srgbClr val="5C7088"/>
+                </a:solidFill>
+                <a:latin typeface="맑은 고딕" pitchFamily="34" charset="0"/>
+                <a:ea typeface="맑은 고딕" pitchFamily="34" charset="-122"/>
+                <a:cs typeface="맑은 고딕" pitchFamily="34" charset="-120"/>
+              </a:rPr>
+              <a:t>위</a:t>
+            </a:r>
+            <a:r>
+              <a:rPr lang="en-US" sz="1300" dirty="0">
+                <a:solidFill>
+                  <a:srgbClr val="5C7088"/>
+                </a:solidFill>
+                <a:latin typeface="맑은 고딕" pitchFamily="34" charset="0"/>
+                <a:ea typeface="맑은 고딕" pitchFamily="34" charset="-122"/>
+                <a:cs typeface="맑은 고딕" pitchFamily="34" charset="-120"/>
+              </a:rPr>
+              <a:t> ‘</a:t>
+            </a:r>
+            <a:r>
+              <a:rPr lang="ko-KR" altLang="en-US" sz="1300" dirty="0">
+                <a:solidFill>
+                  <a:srgbClr val="5C7088"/>
+                </a:solidFill>
+                <a:latin typeface="맑은 고딕" pitchFamily="34" charset="0"/>
+                <a:ea typeface="맑은 고딕" pitchFamily="34" charset="-122"/>
+                <a:cs typeface="맑은 고딕" pitchFamily="34" charset="-120"/>
+              </a:rPr>
+              <a:t>파란색 점</a:t>
+            </a:r>
+            <a:r>
+              <a:rPr lang="en-US" sz="1300" dirty="0">
+                <a:solidFill>
+                  <a:srgbClr val="5C7088"/>
+                </a:solidFill>
+                <a:latin typeface="맑은 고딕" pitchFamily="34" charset="0"/>
+                <a:ea typeface="맑은 고딕" pitchFamily="34" charset="-122"/>
+                <a:cs typeface="맑은 고딕" pitchFamily="34" charset="-120"/>
+              </a:rPr>
+              <a:t>’으로 현재 위치를 표시 (HTTPS 환경, 즉 GitHub Pages에서만 정상 동작)</a:t>
             </a:r>
             <a:endParaRPr lang="en-US" sz="1600" dirty="0"/>
           </a:p>
@@ -7546,7 +8333,51 @@
                 <a:ea typeface="맑은 고딕" pitchFamily="34" charset="-122"/>
                 <a:cs typeface="맑은 고딕" pitchFamily="34" charset="-120"/>
               </a:rPr>
-              <a:t>필터 칩과 검색창은 같은 화장실 목록을 다른 조건으로 ‘다시 그리는’ 방식으로 동작합니다</a:t>
+              <a:t>필터 칩과 검색창은 같은 화장실 목록을 다른 조건으로 ‘다시 그리는’ </a:t>
+            </a:r>
+            <a:r>
+              <a:rPr lang="en-US" sz="1500" dirty="0" err="1">
+                <a:solidFill>
+                  <a:srgbClr val="5C7088"/>
+                </a:solidFill>
+                <a:latin typeface="맑은 고딕" pitchFamily="34" charset="0"/>
+                <a:ea typeface="맑은 고딕" pitchFamily="34" charset="-122"/>
+                <a:cs typeface="맑은 고딕" pitchFamily="34" charset="-120"/>
+              </a:rPr>
+              <a:t>방식으로</a:t>
+            </a:r>
+            <a:r>
+              <a:rPr lang="en-US" sz="1500" dirty="0">
+                <a:solidFill>
+                  <a:srgbClr val="5C7088"/>
+                </a:solidFill>
+                <a:latin typeface="맑은 고딕" pitchFamily="34" charset="0"/>
+                <a:ea typeface="맑은 고딕" pitchFamily="34" charset="-122"/>
+                <a:cs typeface="맑은 고딕" pitchFamily="34" charset="-120"/>
+              </a:rPr>
+              <a:t> </a:t>
+            </a:r>
+            <a:r>
+              <a:rPr lang="en-US" sz="1500" dirty="0" err="1">
+                <a:solidFill>
+                  <a:srgbClr val="5C7088"/>
+                </a:solidFill>
+                <a:latin typeface="맑은 고딕" pitchFamily="34" charset="0"/>
+                <a:ea typeface="맑은 고딕" pitchFamily="34" charset="-122"/>
+                <a:cs typeface="맑은 고딕" pitchFamily="34" charset="-120"/>
+              </a:rPr>
+              <a:t>동작합니다</a:t>
+            </a:r>
+            <a:r>
+              <a:rPr lang="en-US" altLang="ko-KR" sz="1500" dirty="0">
+                <a:solidFill>
+                  <a:srgbClr val="5C7088"/>
+                </a:solidFill>
+                <a:latin typeface="맑은 고딕" pitchFamily="34" charset="0"/>
+                <a:ea typeface="맑은 고딕" pitchFamily="34" charset="-122"/>
+                <a:cs typeface="맑은 고딕" pitchFamily="34" charset="-120"/>
+              </a:rPr>
+              <a:t>.</a:t>
             </a:r>
             <a:endParaRPr lang="en-US" sz="1500" dirty="0"/>
           </a:p>
@@ -7624,7 +8455,29 @@
                 <a:ea typeface="Consolas" pitchFamily="34" charset="-122"/>
                 <a:cs typeface="Consolas" pitchFamily="34" charset="-120"/>
               </a:rPr>
-              <a:t>function passFilter(t) {</a:t>
+              <a:t>function </a:t>
+            </a:r>
+            <a:r>
+              <a:rPr lang="en-US" sz="1350" dirty="0">
+                <a:solidFill>
+                  <a:srgbClr val="FFFF00"/>
+                </a:solidFill>
+                <a:latin typeface="Consolas" pitchFamily="34" charset="0"/>
+                <a:ea typeface="Consolas" pitchFamily="34" charset="-122"/>
+                <a:cs typeface="Consolas" pitchFamily="34" charset="-120"/>
+              </a:rPr>
+              <a:t>passFilter</a:t>
+            </a:r>
+            <a:r>
+              <a:rPr lang="en-US" sz="1350" dirty="0">
+                <a:solidFill>
+                  <a:srgbClr val="CFE3FF"/>
+                </a:solidFill>
+                <a:latin typeface="Consolas" pitchFamily="34" charset="0"/>
+                <a:ea typeface="Consolas" pitchFamily="34" charset="-122"/>
+                <a:cs typeface="Consolas" pitchFamily="34" charset="-120"/>
+              </a:rPr>
+              <a:t>(t) {</a:t>
             </a:r>
             <a:endParaRPr lang="en-US" sz="1350" dirty="0"/>
           </a:p>
@@ -7644,7 +8497,29 @@
                 <a:ea typeface="Consolas" pitchFamily="34" charset="-122"/>
                 <a:cs typeface="Consolas" pitchFamily="34" charset="-120"/>
               </a:rPr>
-              <a:t>  switch (activeFilter) {</a:t>
+              <a:t>  switch (</a:t>
+            </a:r>
+            <a:r>
+              <a:rPr lang="en-US" sz="1350" dirty="0">
+                <a:solidFill>
+                  <a:srgbClr val="FFFF00"/>
+                </a:solidFill>
+                <a:latin typeface="Consolas" pitchFamily="34" charset="0"/>
+                <a:ea typeface="Consolas" pitchFamily="34" charset="-122"/>
+                <a:cs typeface="Consolas" pitchFamily="34" charset="-120"/>
+              </a:rPr>
+              <a:t>activeFilter</a:t>
+            </a:r>
+            <a:r>
+              <a:rPr lang="en-US" sz="1350" dirty="0">
+                <a:solidFill>
+                  <a:srgbClr val="CFE3FF"/>
+                </a:solidFill>
+                <a:latin typeface="Consolas" pitchFamily="34" charset="0"/>
+                <a:ea typeface="Consolas" pitchFamily="34" charset="-122"/>
+                <a:cs typeface="Consolas" pitchFamily="34" charset="-120"/>
+              </a:rPr>
+              <a:t>) {</a:t>
             </a:r>
             <a:endParaRPr lang="en-US" sz="1350" dirty="0"/>
           </a:p>
@@ -7656,7 +8531,7 @@
               <a:buNone/>
             </a:pPr>
             <a:r>
-              <a:rPr lang="en-US" sz="1350" dirty="0">
+              <a:rPr lang="ko-KR" altLang="en-US" sz="1350" dirty="0">
                 <a:solidFill>
                   <a:srgbClr val="CFE3FF"/>
                 </a:solidFill>
@@ -7664,17 +8539,8 @@
                 <a:ea typeface="Consolas" pitchFamily="34" charset="-122"/>
                 <a:cs typeface="Consolas" pitchFamily="34" charset="-120"/>
               </a:rPr>
-              <a:t>    case 'bidet':    return t.bidet;</a:t>
-            </a:r>
-            <a:endParaRPr lang="en-US" sz="1350" dirty="0"/>
-          </a:p>
-          <a:p>
-            <a:pPr marL="0" indent="0">
-              <a:lnSpc>
-                <a:spcPct val="118000"/>
-              </a:lnSpc>
-              <a:buNone/>
-            </a:pPr>
+              <a:t>    </a:t>
+            </a:r>
             <a:r>
               <a:rPr lang="en-US" sz="1350" dirty="0">
                 <a:solidFill>
@@ -7684,7 +8550,7 @@
                 <a:ea typeface="Consolas" pitchFamily="34" charset="-122"/>
                 <a:cs typeface="Consolas" pitchFamily="34" charset="-120"/>
               </a:rPr>
-              <a:t>    case 'open24h':  return t.open24h;</a:t>
+              <a:t>case 'open24h':  return t.open24h;</a:t>
             </a:r>
             <a:endParaRPr lang="en-US" sz="1350" dirty="0"/>
           </a:p>
@@ -7867,7 +8733,29 @@
                 <a:ea typeface="맑은 고딕" pitchFamily="34" charset="-122"/>
                 <a:cs typeface="맑은 고딕" pitchFamily="34" charset="-120"/>
               </a:rPr>
-              <a:t>필터 칩(전체/비데/24시간/장애인용/공용/비밀)을 누르면 activeFilter 값이 바뀜</a:t>
+              <a:t>필터 칩(</a:t>
+            </a:r>
+            <a:r>
+              <a:rPr lang="en-US" sz="1300" dirty="0" err="1">
+                <a:solidFill>
+                  <a:srgbClr val="5C7088"/>
+                </a:solidFill>
+                <a:latin typeface="맑은 고딕" pitchFamily="34" charset="0"/>
+                <a:ea typeface="맑은 고딕" pitchFamily="34" charset="-122"/>
+                <a:cs typeface="맑은 고딕" pitchFamily="34" charset="-120"/>
+              </a:rPr>
+              <a:t>전체</a:t>
+            </a:r>
+            <a:r>
+              <a:rPr lang="en-US" sz="1300" dirty="0">
+                <a:solidFill>
+                  <a:srgbClr val="5C7088"/>
+                </a:solidFill>
+                <a:latin typeface="맑은 고딕" pitchFamily="34" charset="0"/>
+                <a:ea typeface="맑은 고딕" pitchFamily="34" charset="-122"/>
+                <a:cs typeface="맑은 고딕" pitchFamily="34" charset="-120"/>
+              </a:rPr>
+              <a:t>/24시간/장애인용/공용/비밀)을 누르면 activeFilter 값이 바뀜</a:t>
             </a:r>
             <a:endParaRPr lang="en-US" sz="1600" dirty="0"/>
           </a:p>
@@ -8116,7 +9004,106 @@
                 <a:ea typeface="맑은 고딕" pitchFamily="34" charset="-122"/>
                 <a:cs typeface="맑은 고딕" pitchFamily="34" charset="-120"/>
               </a:rPr>
-              <a:t>코인 1개로 비밀번호를 ‘영구 해금’하며, unlockedIds 목록으로 중복 차감을 방지합니다</a:t>
+              <a:t>코인 1개로 </a:t>
+            </a:r>
+            <a:r>
+              <a:rPr lang="en-US" sz="1500" dirty="0" err="1">
+                <a:solidFill>
+                  <a:srgbClr val="5C7088"/>
+                </a:solidFill>
+                <a:latin typeface="맑은 고딕" pitchFamily="34" charset="0"/>
+                <a:ea typeface="맑은 고딕" pitchFamily="34" charset="-122"/>
+                <a:cs typeface="맑은 고딕" pitchFamily="34" charset="-120"/>
+              </a:rPr>
+              <a:t>비밀번호를</a:t>
+            </a:r>
+            <a:r>
+              <a:rPr lang="en-US" sz="1500" dirty="0">
+                <a:solidFill>
+                  <a:srgbClr val="5C7088"/>
+                </a:solidFill>
+                <a:latin typeface="맑은 고딕" pitchFamily="34" charset="0"/>
+                <a:ea typeface="맑은 고딕" pitchFamily="34" charset="-122"/>
+                <a:cs typeface="맑은 고딕" pitchFamily="34" charset="-120"/>
+              </a:rPr>
+              <a:t> </a:t>
+            </a:r>
+            <a:r>
+              <a:rPr lang="ko-KR" altLang="en-US" sz="1500" dirty="0">
+                <a:solidFill>
+                  <a:srgbClr val="5C7088"/>
+                </a:solidFill>
+                <a:latin typeface="맑은 고딕" pitchFamily="34" charset="0"/>
+                <a:ea typeface="맑은 고딕" pitchFamily="34" charset="-122"/>
+                <a:cs typeface="맑은 고딕" pitchFamily="34" charset="-120"/>
+              </a:rPr>
+              <a:t>영구 해제</a:t>
+            </a:r>
+            <a:r>
+              <a:rPr lang="en-US" sz="1500" dirty="0" err="1">
+                <a:solidFill>
+                  <a:srgbClr val="5C7088"/>
+                </a:solidFill>
+                <a:latin typeface="맑은 고딕" pitchFamily="34" charset="0"/>
+                <a:ea typeface="맑은 고딕" pitchFamily="34" charset="-122"/>
+                <a:cs typeface="맑은 고딕" pitchFamily="34" charset="-120"/>
+              </a:rPr>
+              <a:t>하며</a:t>
+            </a:r>
+            <a:r>
+              <a:rPr lang="en-US" sz="1500" dirty="0">
+                <a:solidFill>
+                  <a:srgbClr val="5C7088"/>
+                </a:solidFill>
+                <a:latin typeface="맑은 고딕" pitchFamily="34" charset="0"/>
+                <a:ea typeface="맑은 고딕" pitchFamily="34" charset="-122"/>
+                <a:cs typeface="맑은 고딕" pitchFamily="34" charset="-120"/>
+              </a:rPr>
+              <a:t>, unlockedIds 목록으로 중복 </a:t>
+            </a:r>
+            <a:r>
+              <a:rPr lang="en-US" sz="1500" dirty="0" err="1">
+                <a:solidFill>
+                  <a:srgbClr val="5C7088"/>
+                </a:solidFill>
+                <a:latin typeface="맑은 고딕" pitchFamily="34" charset="0"/>
+                <a:ea typeface="맑은 고딕" pitchFamily="34" charset="-122"/>
+                <a:cs typeface="맑은 고딕" pitchFamily="34" charset="-120"/>
+              </a:rPr>
+              <a:t>차감을</a:t>
+            </a:r>
+            <a:r>
+              <a:rPr lang="en-US" sz="1500" dirty="0">
+                <a:solidFill>
+                  <a:srgbClr val="5C7088"/>
+                </a:solidFill>
+                <a:latin typeface="맑은 고딕" pitchFamily="34" charset="0"/>
+                <a:ea typeface="맑은 고딕" pitchFamily="34" charset="-122"/>
+                <a:cs typeface="맑은 고딕" pitchFamily="34" charset="-120"/>
+              </a:rPr>
+              <a:t> </a:t>
+            </a:r>
+            <a:r>
+              <a:rPr lang="en-US" sz="1500" dirty="0" err="1">
+                <a:solidFill>
+                  <a:srgbClr val="5C7088"/>
+                </a:solidFill>
+                <a:latin typeface="맑은 고딕" pitchFamily="34" charset="0"/>
+                <a:ea typeface="맑은 고딕" pitchFamily="34" charset="-122"/>
+                <a:cs typeface="맑은 고딕" pitchFamily="34" charset="-120"/>
+              </a:rPr>
+              <a:t>방지합니다</a:t>
+            </a:r>
+            <a:r>
+              <a:rPr lang="en-US" altLang="ko-KR" sz="1500" dirty="0">
+                <a:solidFill>
+                  <a:srgbClr val="5C7088"/>
+                </a:solidFill>
+                <a:latin typeface="맑은 고딕" pitchFamily="34" charset="0"/>
+                <a:ea typeface="맑은 고딕" pitchFamily="34" charset="-122"/>
+                <a:cs typeface="맑은 고딕" pitchFamily="34" charset="-120"/>
+              </a:rPr>
+              <a:t>.</a:t>
             </a:r>
             <a:endParaRPr lang="en-US" sz="1500" dirty="0"/>
           </a:p>
@@ -8194,7 +9181,29 @@
                 <a:ea typeface="Consolas" pitchFamily="34" charset="-122"/>
                 <a:cs typeface="Consolas" pitchFamily="34" charset="-120"/>
               </a:rPr>
-              <a:t>function useCoin(){</a:t>
+              <a:t>function </a:t>
+            </a:r>
+            <a:r>
+              <a:rPr lang="en-US" sz="1300" dirty="0">
+                <a:solidFill>
+                  <a:srgbClr val="FFFF00"/>
+                </a:solidFill>
+                <a:latin typeface="Consolas" pitchFamily="34" charset="0"/>
+                <a:ea typeface="Consolas" pitchFamily="34" charset="-122"/>
+                <a:cs typeface="Consolas" pitchFamily="34" charset="-120"/>
+              </a:rPr>
+              <a:t>useCoin</a:t>
+            </a:r>
+            <a:r>
+              <a:rPr lang="en-US" sz="1300" dirty="0">
+                <a:solidFill>
+                  <a:srgbClr val="CFE3FF"/>
+                </a:solidFill>
+                <a:latin typeface="Consolas" pitchFamily="34" charset="0"/>
+                <a:ea typeface="Consolas" pitchFamily="34" charset="-122"/>
+                <a:cs typeface="Consolas" pitchFamily="34" charset="-120"/>
+              </a:rPr>
+              <a:t>(){</a:t>
             </a:r>
             <a:endParaRPr lang="en-US" sz="1300" dirty="0"/>
           </a:p>
@@ -8303,7 +9312,29 @@
                 <a:ea typeface="Consolas" pitchFamily="34" charset="-122"/>
                 <a:cs typeface="Consolas" pitchFamily="34" charset="-120"/>
               </a:rPr>
-              <a:t>    unlockedIds.push(sel.id);</a:t>
+              <a:t>    </a:t>
+            </a:r>
+            <a:r>
+              <a:rPr lang="en-US" sz="1300" dirty="0">
+                <a:solidFill>
+                  <a:srgbClr val="FFFF00"/>
+                </a:solidFill>
+                <a:latin typeface="Consolas" pitchFamily="34" charset="0"/>
+                <a:ea typeface="Consolas" pitchFamily="34" charset="-122"/>
+                <a:cs typeface="Consolas" pitchFamily="34" charset="-120"/>
+              </a:rPr>
+              <a:t>unlockedIds</a:t>
+            </a:r>
+            <a:r>
+              <a:rPr lang="en-US" sz="1300" dirty="0">
+                <a:solidFill>
+                  <a:srgbClr val="CFE3FF"/>
+                </a:solidFill>
+                <a:latin typeface="Consolas" pitchFamily="34" charset="0"/>
+                <a:ea typeface="Consolas" pitchFamily="34" charset="-122"/>
+                <a:cs typeface="Consolas" pitchFamily="34" charset="-120"/>
+              </a:rPr>
+              <a:t>.push(sel.id);</a:t>
             </a:r>
             <a:endParaRPr lang="en-US" sz="1300" dirty="0"/>
           </a:p>
@@ -8526,7 +9557,73 @@
                 <a:ea typeface="맑은 고딕" pitchFamily="34" charset="-122"/>
                 <a:cs typeface="맑은 고딕" pitchFamily="34" charset="-120"/>
               </a:rPr>
-              <a:t>상세창은 “잠김/해금” 두 영역을 미리 만들어두고 display로만 전환 — 화면이 깨지지 않도록 설계</a:t>
+              <a:t>상세창은 “</a:t>
+            </a:r>
+            <a:r>
+              <a:rPr lang="en-US" sz="1300" dirty="0" err="1">
+                <a:solidFill>
+                  <a:srgbClr val="5C7088"/>
+                </a:solidFill>
+                <a:latin typeface="맑은 고딕" pitchFamily="34" charset="0"/>
+                <a:ea typeface="맑은 고딕" pitchFamily="34" charset="-122"/>
+                <a:cs typeface="맑은 고딕" pitchFamily="34" charset="-120"/>
+              </a:rPr>
+              <a:t>잠</a:t>
+            </a:r>
+            <a:r>
+              <a:rPr lang="ko-KR" altLang="en-US" sz="1300" dirty="0">
+                <a:solidFill>
+                  <a:srgbClr val="5C7088"/>
+                </a:solidFill>
+                <a:latin typeface="맑은 고딕" pitchFamily="34" charset="0"/>
+                <a:ea typeface="맑은 고딕" pitchFamily="34" charset="-122"/>
+                <a:cs typeface="맑은 고딕" pitchFamily="34" charset="-120"/>
+              </a:rPr>
+              <a:t>금</a:t>
+            </a:r>
+            <a:r>
+              <a:rPr lang="en-US" sz="1300" dirty="0">
+                <a:solidFill>
+                  <a:srgbClr val="5C7088"/>
+                </a:solidFill>
+                <a:latin typeface="맑은 고딕" pitchFamily="34" charset="0"/>
+                <a:ea typeface="맑은 고딕" pitchFamily="34" charset="-122"/>
+                <a:cs typeface="맑은 고딕" pitchFamily="34" charset="-120"/>
+              </a:rPr>
+              <a:t>/</a:t>
+            </a:r>
+            <a:r>
+              <a:rPr lang="en-US" sz="1300" dirty="0" err="1">
+                <a:solidFill>
+                  <a:srgbClr val="5C7088"/>
+                </a:solidFill>
+                <a:latin typeface="맑은 고딕" pitchFamily="34" charset="0"/>
+                <a:ea typeface="맑은 고딕" pitchFamily="34" charset="-122"/>
+                <a:cs typeface="맑은 고딕" pitchFamily="34" charset="-120"/>
+              </a:rPr>
+              <a:t>해</a:t>
+            </a:r>
+            <a:r>
+              <a:rPr lang="ko-KR" altLang="en-US" sz="1300" dirty="0">
+                <a:solidFill>
+                  <a:srgbClr val="5C7088"/>
+                </a:solidFill>
+                <a:latin typeface="맑은 고딕" pitchFamily="34" charset="0"/>
+                <a:ea typeface="맑은 고딕" pitchFamily="34" charset="-122"/>
+                <a:cs typeface="맑은 고딕" pitchFamily="34" charset="-120"/>
+              </a:rPr>
+              <a:t>제</a:t>
+            </a:r>
+            <a:r>
+              <a:rPr lang="en-US" sz="1300" dirty="0">
+                <a:solidFill>
+                  <a:srgbClr val="5C7088"/>
+                </a:solidFill>
+                <a:latin typeface="맑은 고딕" pitchFamily="34" charset="0"/>
+                <a:ea typeface="맑은 고딕" pitchFamily="34" charset="-122"/>
+                <a:cs typeface="맑은 고딕" pitchFamily="34" charset="-120"/>
+              </a:rPr>
+              <a:t>” 두 영역을 미리 만들어두고 display로만 전환 — 화면이 깨지지 않도록 설계</a:t>
             </a:r>
             <a:endParaRPr lang="en-US" sz="1600" dirty="0"/>
           </a:p>
@@ -8715,7 +9812,51 @@
                 <a:ea typeface="맑은 고딕" pitchFamily="34" charset="-122"/>
                 <a:cs typeface="맑은 고딕" pitchFamily="34" charset="-120"/>
               </a:rPr>
-              <a:t>작성한 리뷰는 reviewsDB 객체에 누적되고, 기존 평점과 합산되어 화면에 반영됩니다</a:t>
+              <a:t>작성한 리뷰는 reviewsDB 객체에 누적되고, 기존 평점과 합산되어 </a:t>
+            </a:r>
+            <a:r>
+              <a:rPr lang="en-US" sz="1500" dirty="0" err="1">
+                <a:solidFill>
+                  <a:srgbClr val="5C7088"/>
+                </a:solidFill>
+                <a:latin typeface="맑은 고딕" pitchFamily="34" charset="0"/>
+                <a:ea typeface="맑은 고딕" pitchFamily="34" charset="-122"/>
+                <a:cs typeface="맑은 고딕" pitchFamily="34" charset="-120"/>
+              </a:rPr>
+              <a:t>화면에</a:t>
+            </a:r>
+            <a:r>
+              <a:rPr lang="en-US" sz="1500" dirty="0">
+                <a:solidFill>
+                  <a:srgbClr val="5C7088"/>
+                </a:solidFill>
+                <a:latin typeface="맑은 고딕" pitchFamily="34" charset="0"/>
+                <a:ea typeface="맑은 고딕" pitchFamily="34" charset="-122"/>
+                <a:cs typeface="맑은 고딕" pitchFamily="34" charset="-120"/>
+              </a:rPr>
+              <a:t> </a:t>
+            </a:r>
+            <a:r>
+              <a:rPr lang="en-US" sz="1500" dirty="0" err="1">
+                <a:solidFill>
+                  <a:srgbClr val="5C7088"/>
+                </a:solidFill>
+                <a:latin typeface="맑은 고딕" pitchFamily="34" charset="0"/>
+                <a:ea typeface="맑은 고딕" pitchFamily="34" charset="-122"/>
+                <a:cs typeface="맑은 고딕" pitchFamily="34" charset="-120"/>
+              </a:rPr>
+              <a:t>반영됩니다</a:t>
+            </a:r>
+            <a:r>
+              <a:rPr lang="en-US" altLang="ko-KR" sz="1500" dirty="0">
+                <a:solidFill>
+                  <a:srgbClr val="5C7088"/>
+                </a:solidFill>
+                <a:latin typeface="맑은 고딕" pitchFamily="34" charset="0"/>
+                <a:ea typeface="맑은 고딕" pitchFamily="34" charset="-122"/>
+                <a:cs typeface="맑은 고딕" pitchFamily="34" charset="-120"/>
+              </a:rPr>
+              <a:t>.</a:t>
             </a:r>
             <a:endParaRPr lang="en-US" sz="1500" dirty="0"/>
           </a:p>
@@ -8793,7 +9934,29 @@
                 <a:ea typeface="Consolas" pitchFamily="34" charset="-122"/>
                 <a:cs typeface="Consolas" pitchFamily="34" charset="-120"/>
               </a:rPr>
-              <a:t>function computeRating(t){</a:t>
+              <a:t>function </a:t>
+            </a:r>
+            <a:r>
+              <a:rPr lang="en-US" sz="1300" dirty="0">
+                <a:solidFill>
+                  <a:srgbClr val="FFFF00"/>
+                </a:solidFill>
+                <a:latin typeface="Consolas" pitchFamily="34" charset="0"/>
+                <a:ea typeface="Consolas" pitchFamily="34" charset="-122"/>
+                <a:cs typeface="Consolas" pitchFamily="34" charset="-120"/>
+              </a:rPr>
+              <a:t>computeRating</a:t>
+            </a:r>
+            <a:r>
+              <a:rPr lang="en-US" sz="1300" dirty="0">
+                <a:solidFill>
+                  <a:srgbClr val="CFE3FF"/>
+                </a:solidFill>
+                <a:latin typeface="Consolas" pitchFamily="34" charset="0"/>
+                <a:ea typeface="Consolas" pitchFamily="34" charset="-122"/>
+                <a:cs typeface="Consolas" pitchFamily="34" charset="-120"/>
+              </a:rPr>
+              <a:t>(t){</a:t>
             </a:r>
             <a:endParaRPr lang="en-US" sz="1300" dirty="0"/>
           </a:p>
@@ -8813,7 +9976,29 @@
                 <a:ea typeface="Consolas" pitchFamily="34" charset="-122"/>
                 <a:cs typeface="Consolas" pitchFamily="34" charset="-120"/>
               </a:rPr>
-              <a:t>  const uRevs = reviewsDB[String(t.id)] || [];</a:t>
+              <a:t>  const uRevs = </a:t>
+            </a:r>
+            <a:r>
+              <a:rPr lang="en-US" sz="1300" dirty="0">
+                <a:solidFill>
+                  <a:srgbClr val="FFFF00"/>
+                </a:solidFill>
+                <a:latin typeface="Consolas" pitchFamily="34" charset="0"/>
+                <a:ea typeface="Consolas" pitchFamily="34" charset="-122"/>
+                <a:cs typeface="Consolas" pitchFamily="34" charset="-120"/>
+              </a:rPr>
+              <a:t>reviewsDB</a:t>
+            </a:r>
+            <a:r>
+              <a:rPr lang="en-US" sz="1300" dirty="0">
+                <a:solidFill>
+                  <a:srgbClr val="CFE3FF"/>
+                </a:solidFill>
+                <a:latin typeface="Consolas" pitchFamily="34" charset="0"/>
+                <a:ea typeface="Consolas" pitchFamily="34" charset="-122"/>
+                <a:cs typeface="Consolas" pitchFamily="34" charset="-120"/>
+              </a:rPr>
+              <a:t>[String(t.id)] || [];</a:t>
             </a:r>
             <a:endParaRPr lang="en-US" sz="1300" dirty="0"/>
           </a:p>
@@ -9085,7 +10270,89 @@
                 <a:ea typeface="맑은 고딕" pitchFamily="34" charset="-122"/>
                 <a:cs typeface="맑은 고딕" pitchFamily="34" charset="-120"/>
               </a:rPr>
-              <a:t>리뷰 작성 시 코인 +1 지급 → 모인 코인으로 비밀 화장실을 해금하는 선순환 구조</a:t>
+              <a:t>리뷰 작성 시 코인 +1 </a:t>
+            </a:r>
+            <a:r>
+              <a:rPr lang="en-US" sz="1300" dirty="0" err="1">
+                <a:solidFill>
+                  <a:srgbClr val="5C7088"/>
+                </a:solidFill>
+                <a:latin typeface="맑은 고딕" pitchFamily="34" charset="0"/>
+                <a:ea typeface="맑은 고딕" pitchFamily="34" charset="-122"/>
+                <a:cs typeface="맑은 고딕" pitchFamily="34" charset="-120"/>
+              </a:rPr>
+              <a:t>지급</a:t>
+            </a:r>
+            <a:r>
+              <a:rPr lang="en-US" sz="1300" dirty="0">
+                <a:solidFill>
+                  <a:srgbClr val="5C7088"/>
+                </a:solidFill>
+                <a:latin typeface="맑은 고딕" pitchFamily="34" charset="0"/>
+                <a:ea typeface="맑은 고딕" pitchFamily="34" charset="-122"/>
+                <a:cs typeface="맑은 고딕" pitchFamily="34" charset="-120"/>
+              </a:rPr>
+              <a:t> </a:t>
+            </a:r>
+          </a:p>
+          <a:p>
+            <a:pPr>
+              <a:buSzPct val="100000"/>
+            </a:pPr>
+            <a:r>
+              <a:rPr lang="en-US" sz="1300" dirty="0">
+                <a:solidFill>
+                  <a:srgbClr val="5C7088"/>
+                </a:solidFill>
+                <a:latin typeface="맑은 고딕" pitchFamily="34" charset="0"/>
+                <a:ea typeface="맑은 고딕" pitchFamily="34" charset="-122"/>
+                <a:cs typeface="맑은 고딕" pitchFamily="34" charset="-120"/>
+              </a:rPr>
+              <a:t>	→ 모인 코인으로 비밀 </a:t>
+            </a:r>
+            <a:r>
+              <a:rPr lang="en-US" sz="1300" dirty="0" err="1">
+                <a:solidFill>
+                  <a:srgbClr val="5C7088"/>
+                </a:solidFill>
+                <a:latin typeface="맑은 고딕" pitchFamily="34" charset="0"/>
+                <a:ea typeface="맑은 고딕" pitchFamily="34" charset="-122"/>
+                <a:cs typeface="맑은 고딕" pitchFamily="34" charset="-120"/>
+              </a:rPr>
+              <a:t>화장실을</a:t>
+            </a:r>
+            <a:r>
+              <a:rPr lang="en-US" sz="1300" dirty="0">
+                <a:solidFill>
+                  <a:srgbClr val="5C7088"/>
+                </a:solidFill>
+                <a:latin typeface="맑은 고딕" pitchFamily="34" charset="0"/>
+                <a:ea typeface="맑은 고딕" pitchFamily="34" charset="-122"/>
+                <a:cs typeface="맑은 고딕" pitchFamily="34" charset="-120"/>
+              </a:rPr>
+              <a:t> </a:t>
+            </a:r>
+            <a:r>
+              <a:rPr lang="en-US" sz="1300" dirty="0" err="1">
+                <a:solidFill>
+                  <a:srgbClr val="5C7088"/>
+                </a:solidFill>
+                <a:latin typeface="맑은 고딕" pitchFamily="34" charset="0"/>
+                <a:ea typeface="맑은 고딕" pitchFamily="34" charset="-122"/>
+                <a:cs typeface="맑은 고딕" pitchFamily="34" charset="-120"/>
+              </a:rPr>
+              <a:t>해</a:t>
+            </a:r>
+            <a:r>
+              <a:rPr lang="ko-KR" altLang="en-US" sz="1300" dirty="0">
+                <a:solidFill>
+                  <a:srgbClr val="5C7088"/>
+                </a:solidFill>
+                <a:latin typeface="맑은 고딕" pitchFamily="34" charset="0"/>
+                <a:ea typeface="맑은 고딕" pitchFamily="34" charset="-122"/>
+                <a:cs typeface="맑은 고딕" pitchFamily="34" charset="-120"/>
+              </a:rPr>
+              <a:t>제</a:t>
             </a:r>
             <a:endParaRPr lang="en-US" sz="1600" dirty="0"/>
           </a:p>
